--- a/brain/library/internal/one-pagers/Fertility IVF Clinic Software April 2026.pptx
+++ b/brain/library/internal/one-pagers/Fertility IVF Clinic Software April 2026.pptx
@@ -15115,7 +15115,7 @@
                       </a:pPr>
                       <a:r>
                         <a:rPr b="1" lang="en-US" sz="1400" u="none" cap="none" strike="noStrike"/>
-                        <a:t>Pending Scoring</a:t>
+                        <a:t>2.25 / 3.0 (75%) — FAILED Initial Screen (Growth TAM)</a:t>
                       </a:r>
                       <a:r>
                         <a:rPr b="1" lang="en-US">
